--- a/instructor/slides/pptx/lectures/L08.pptx
+++ b/instructor/slides/pptx/lectures/L08.pptx
@@ -4233,8 +4233,8 @@
         </p:nvSpPr>
         <p:spPr>
           <a:xfrm>
-            <a:off x="640080" y="1920240"/>
-            <a:ext cx="10972800" cy="1463040"/>
+            <a:off x="640080" y="1828800"/>
+            <a:ext cx="6675120" cy="1645920"/>
           </a:xfrm>
           <a:prstGeom prst="rect">
             <a:avLst/>
@@ -4248,7 +4248,7 @@
           <a:lstStyle/>
           <a:p>
             <a:r>
-              <a:rPr sz="4400" b="1">
+              <a:rPr sz="4000" b="1">
                 <a:solidFill>
                   <a:srgbClr val="FFFFFF"/>
                 </a:solidFill>
@@ -4267,8 +4267,8 @@
         </p:nvSpPr>
         <p:spPr>
           <a:xfrm>
-            <a:off x="640080" y="3657600"/>
-            <a:ext cx="10789920" cy="1097280"/>
+            <a:off x="640080" y="3794760"/>
+            <a:ext cx="6675120" cy="1097280"/>
           </a:xfrm>
           <a:prstGeom prst="rect">
             <a:avLst/>
@@ -4282,7 +4282,7 @@
           <a:lstStyle/>
           <a:p>
             <a:r>
-              <a:rPr sz="2000" b="0">
+              <a:rPr sz="1800" b="0">
                 <a:solidFill>
                   <a:srgbClr val="B7CBDE"/>
                 </a:solidFill>
@@ -4301,8 +4301,8 @@
         </p:nvSpPr>
         <p:spPr>
           <a:xfrm>
-            <a:off x="640080" y="5029200"/>
-            <a:ext cx="10972800" cy="457200"/>
+            <a:off x="640080" y="5120640"/>
+            <a:ext cx="6766560" cy="457200"/>
           </a:xfrm>
           <a:prstGeom prst="rect">
             <a:avLst/>
@@ -4316,7 +4316,7 @@
           <a:lstStyle/>
           <a:p>
             <a:r>
-              <a:rPr sz="1600" b="0">
+              <a:rPr sz="1500" b="0">
                 <a:solidFill>
                   <a:srgbClr val="3EC6FF"/>
                 </a:solidFill>
@@ -4327,6 +4327,30 @@
           </a:p>
         </p:txBody>
       </p:sp>
+      <p:pic>
+        <p:nvPicPr>
+          <p:cNvPr id="7" name="Picture 6" descr="dw-script.jpg"/>
+          <p:cNvPicPr>
+            <a:picLocks noChangeAspect="1"/>
+          </p:cNvPicPr>
+          <p:nvPr/>
+        </p:nvPicPr>
+        <p:blipFill>
+          <a:blip r:embed="rId2"/>
+          <a:stretch>
+            <a:fillRect/>
+          </a:stretch>
+        </p:blipFill>
+        <p:spPr>
+          <a:xfrm>
+            <a:off x="7452360" y="1325880"/>
+            <a:ext cx="4160520" cy="4160520"/>
+          </a:xfrm>
+          <a:prstGeom prst="rect">
+            <a:avLst/>
+          </a:prstGeom>
+        </p:spPr>
+      </p:pic>
     </p:spTree>
   </p:cSld>
   <p:clrMapOvr>
@@ -4430,8 +4454,8 @@
         </p:nvSpPr>
         <p:spPr>
           <a:xfrm>
-            <a:off x="640080" y="685800"/>
-            <a:ext cx="10972800" cy="1463040"/>
+            <a:off x="640080" y="658368"/>
+            <a:ext cx="10972800" cy="1645920"/>
           </a:xfrm>
           <a:prstGeom prst="rect">
             <a:avLst/>
@@ -4445,7 +4469,7 @@
           <a:lstStyle/>
           <a:p>
             <a:r>
-              <a:rPr sz="3200" b="1">
+              <a:rPr sz="3000" b="1">
                 <a:solidFill>
                   <a:srgbClr val="FFFFFF"/>
                 </a:solidFill>
@@ -4647,8 +4671,8 @@
         </p:nvSpPr>
         <p:spPr>
           <a:xfrm>
-            <a:off x="640080" y="685800"/>
-            <a:ext cx="10972800" cy="1463040"/>
+            <a:off x="640080" y="658368"/>
+            <a:ext cx="7863840" cy="1645920"/>
           </a:xfrm>
           <a:prstGeom prst="rect">
             <a:avLst/>
@@ -4662,7 +4686,7 @@
           <a:lstStyle/>
           <a:p>
             <a:r>
-              <a:rPr sz="3200" b="1">
+              <a:rPr sz="3000" b="1">
                 <a:solidFill>
                   <a:srgbClr val="FFFFFF"/>
                 </a:solidFill>
@@ -4681,8 +4705,8 @@
         </p:nvSpPr>
         <p:spPr>
           <a:xfrm>
-            <a:off x="777240" y="2286000"/>
-            <a:ext cx="10607040" cy="4754880"/>
+            <a:off x="777240" y="2331720"/>
+            <a:ext cx="7498079" cy="4754880"/>
           </a:xfrm>
           <a:prstGeom prst="rect">
             <a:avLst/>
@@ -4701,7 +4725,7 @@
               </a:spcAft>
             </a:pPr>
             <a:r>
-              <a:rPr sz="2400" b="0">
+              <a:rPr sz="2200" b="0">
                 <a:solidFill>
                   <a:srgbClr val="FFFFFF"/>
                 </a:solidFill>
@@ -4712,6 +4736,30 @@
           </a:p>
         </p:txBody>
       </p:sp>
+      <p:pic>
+        <p:nvPicPr>
+          <p:cNvPr id="6" name="Picture 5" descr="dw-script.jpg"/>
+          <p:cNvPicPr>
+            <a:picLocks noChangeAspect="1"/>
+          </p:cNvPicPr>
+          <p:nvPr/>
+        </p:nvPicPr>
+        <p:blipFill>
+          <a:blip r:embed="rId2"/>
+          <a:stretch>
+            <a:fillRect/>
+          </a:stretch>
+        </p:blipFill>
+        <p:spPr>
+          <a:xfrm>
+            <a:off x="8732520" y="2057400"/>
+            <a:ext cx="2880360" cy="2880360"/>
+          </a:xfrm>
+          <a:prstGeom prst="rect">
+            <a:avLst/>
+          </a:prstGeom>
+        </p:spPr>
+      </p:pic>
     </p:spTree>
   </p:cSld>
   <p:clrMapOvr>
@@ -4815,8 +4863,8 @@
         </p:nvSpPr>
         <p:spPr>
           <a:xfrm>
-            <a:off x="640080" y="685800"/>
-            <a:ext cx="10972800" cy="1463040"/>
+            <a:off x="640080" y="658368"/>
+            <a:ext cx="7863840" cy="1645920"/>
           </a:xfrm>
           <a:prstGeom prst="rect">
             <a:avLst/>
@@ -4830,7 +4878,7 @@
           <a:lstStyle/>
           <a:p>
             <a:r>
-              <a:rPr sz="3200" b="1">
+              <a:rPr sz="3000" b="1">
                 <a:solidFill>
                   <a:srgbClr val="FFFFFF"/>
                 </a:solidFill>
@@ -4849,8 +4897,8 @@
         </p:nvSpPr>
         <p:spPr>
           <a:xfrm>
-            <a:off x="777240" y="2286000"/>
-            <a:ext cx="10607040" cy="4754880"/>
+            <a:off x="777240" y="2331720"/>
+            <a:ext cx="7498079" cy="4754880"/>
           </a:xfrm>
           <a:prstGeom prst="rect">
             <a:avLst/>
@@ -4869,7 +4917,7 @@
               </a:spcAft>
             </a:pPr>
             <a:r>
-              <a:rPr sz="2400" b="0">
+              <a:rPr sz="2200" b="0">
                 <a:solidFill>
                   <a:srgbClr val="FFFFFF"/>
                 </a:solidFill>
@@ -4880,6 +4928,30 @@
           </a:p>
         </p:txBody>
       </p:sp>
+      <p:pic>
+        <p:nvPicPr>
+          <p:cNvPr id="6" name="Picture 5" descr="dw-script.jpg"/>
+          <p:cNvPicPr>
+            <a:picLocks noChangeAspect="1"/>
+          </p:cNvPicPr>
+          <p:nvPr/>
+        </p:nvPicPr>
+        <p:blipFill>
+          <a:blip r:embed="rId2"/>
+          <a:stretch>
+            <a:fillRect/>
+          </a:stretch>
+        </p:blipFill>
+        <p:spPr>
+          <a:xfrm>
+            <a:off x="8732520" y="2057400"/>
+            <a:ext cx="2880360" cy="2880360"/>
+          </a:xfrm>
+          <a:prstGeom prst="rect">
+            <a:avLst/>
+          </a:prstGeom>
+        </p:spPr>
+      </p:pic>
     </p:spTree>
   </p:cSld>
   <p:clrMapOvr>
@@ -4983,8 +5055,8 @@
         </p:nvSpPr>
         <p:spPr>
           <a:xfrm>
-            <a:off x="640080" y="685800"/>
-            <a:ext cx="10972800" cy="1463040"/>
+            <a:off x="640080" y="658368"/>
+            <a:ext cx="7863840" cy="1645920"/>
           </a:xfrm>
           <a:prstGeom prst="rect">
             <a:avLst/>
@@ -4998,7 +5070,7 @@
           <a:lstStyle/>
           <a:p>
             <a:r>
-              <a:rPr sz="3200" b="1">
+              <a:rPr sz="3000" b="1">
                 <a:solidFill>
                   <a:srgbClr val="FFFFFF"/>
                 </a:solidFill>
@@ -5017,8 +5089,8 @@
         </p:nvSpPr>
         <p:spPr>
           <a:xfrm>
-            <a:off x="777240" y="2286000"/>
-            <a:ext cx="10607040" cy="4754880"/>
+            <a:off x="777240" y="2331720"/>
+            <a:ext cx="7498079" cy="4754880"/>
           </a:xfrm>
           <a:prstGeom prst="rect">
             <a:avLst/>
@@ -5037,7 +5109,7 @@
               </a:spcAft>
             </a:pPr>
             <a:r>
-              <a:rPr sz="2400" b="0">
+              <a:rPr sz="2200" b="0">
                 <a:solidFill>
                   <a:srgbClr val="FFFFFF"/>
                 </a:solidFill>
@@ -5053,7 +5125,7 @@
               </a:spcAft>
             </a:pPr>
             <a:r>
-              <a:rPr sz="2400" b="0">
+              <a:rPr sz="2200" b="0">
                 <a:solidFill>
                   <a:srgbClr val="FFFFFF"/>
                 </a:solidFill>
@@ -5064,6 +5136,30 @@
           </a:p>
         </p:txBody>
       </p:sp>
+      <p:pic>
+        <p:nvPicPr>
+          <p:cNvPr id="6" name="Picture 5" descr="dw-script.jpg"/>
+          <p:cNvPicPr>
+            <a:picLocks noChangeAspect="1"/>
+          </p:cNvPicPr>
+          <p:nvPr/>
+        </p:nvPicPr>
+        <p:blipFill>
+          <a:blip r:embed="rId2"/>
+          <a:stretch>
+            <a:fillRect/>
+          </a:stretch>
+        </p:blipFill>
+        <p:spPr>
+          <a:xfrm>
+            <a:off x="8732520" y="2057400"/>
+            <a:ext cx="2880360" cy="2880360"/>
+          </a:xfrm>
+          <a:prstGeom prst="rect">
+            <a:avLst/>
+          </a:prstGeom>
+        </p:spPr>
+      </p:pic>
     </p:spTree>
   </p:cSld>
   <p:clrMapOvr>
@@ -5167,8 +5263,8 @@
         </p:nvSpPr>
         <p:spPr>
           <a:xfrm>
-            <a:off x="640080" y="685800"/>
-            <a:ext cx="10972800" cy="1463040"/>
+            <a:off x="640080" y="658368"/>
+            <a:ext cx="10972800" cy="1645920"/>
           </a:xfrm>
           <a:prstGeom prst="rect">
             <a:avLst/>
@@ -5182,7 +5278,7 @@
           <a:lstStyle/>
           <a:p>
             <a:r>
-              <a:rPr sz="3200" b="1">
+              <a:rPr sz="3000" b="1">
                 <a:solidFill>
                   <a:srgbClr val="FFFFFF"/>
                 </a:solidFill>
@@ -5448,8 +5544,8 @@
         </p:nvSpPr>
         <p:spPr>
           <a:xfrm>
-            <a:off x="640080" y="685800"/>
-            <a:ext cx="10972800" cy="1463040"/>
+            <a:off x="640080" y="658368"/>
+            <a:ext cx="7863840" cy="1645920"/>
           </a:xfrm>
           <a:prstGeom prst="rect">
             <a:avLst/>
@@ -5463,7 +5559,7 @@
           <a:lstStyle/>
           <a:p>
             <a:r>
-              <a:rPr sz="3200" b="1">
+              <a:rPr sz="3000" b="1">
                 <a:solidFill>
                   <a:srgbClr val="FFFFFF"/>
                 </a:solidFill>
@@ -5482,8 +5578,8 @@
         </p:nvSpPr>
         <p:spPr>
           <a:xfrm>
-            <a:off x="777240" y="2286000"/>
-            <a:ext cx="10607040" cy="4754880"/>
+            <a:off x="777240" y="2331720"/>
+            <a:ext cx="7498079" cy="4754880"/>
           </a:xfrm>
           <a:prstGeom prst="rect">
             <a:avLst/>
@@ -5502,7 +5598,7 @@
               </a:spcAft>
             </a:pPr>
             <a:r>
-              <a:rPr sz="2400" b="0">
+              <a:rPr sz="2200" b="0">
                 <a:solidFill>
                   <a:srgbClr val="FFFFFF"/>
                 </a:solidFill>
@@ -5513,6 +5609,30 @@
           </a:p>
         </p:txBody>
       </p:sp>
+      <p:pic>
+        <p:nvPicPr>
+          <p:cNvPr id="6" name="Picture 5" descr="dw-script.jpg"/>
+          <p:cNvPicPr>
+            <a:picLocks noChangeAspect="1"/>
+          </p:cNvPicPr>
+          <p:nvPr/>
+        </p:nvPicPr>
+        <p:blipFill>
+          <a:blip r:embed="rId2"/>
+          <a:stretch>
+            <a:fillRect/>
+          </a:stretch>
+        </p:blipFill>
+        <p:spPr>
+          <a:xfrm>
+            <a:off x="8732520" y="2057400"/>
+            <a:ext cx="2880360" cy="2880360"/>
+          </a:xfrm>
+          <a:prstGeom prst="rect">
+            <a:avLst/>
+          </a:prstGeom>
+        </p:spPr>
+      </p:pic>
     </p:spTree>
   </p:cSld>
   <p:clrMapOvr>
@@ -5616,8 +5736,8 @@
         </p:nvSpPr>
         <p:spPr>
           <a:xfrm>
-            <a:off x="640080" y="685800"/>
-            <a:ext cx="10972800" cy="1463040"/>
+            <a:off x="640080" y="658368"/>
+            <a:ext cx="10972800" cy="1645920"/>
           </a:xfrm>
           <a:prstGeom prst="rect">
             <a:avLst/>
@@ -5631,7 +5751,7 @@
           <a:lstStyle/>
           <a:p>
             <a:r>
-              <a:rPr sz="3200" b="1">
+              <a:rPr sz="3000" b="1">
                 <a:solidFill>
                   <a:srgbClr val="FFFFFF"/>
                 </a:solidFill>
@@ -5865,8 +5985,8 @@
         </p:nvSpPr>
         <p:spPr>
           <a:xfrm>
-            <a:off x="640080" y="685800"/>
-            <a:ext cx="10972800" cy="1463040"/>
+            <a:off x="640080" y="658368"/>
+            <a:ext cx="7863840" cy="1645920"/>
           </a:xfrm>
           <a:prstGeom prst="rect">
             <a:avLst/>
@@ -5880,7 +6000,7 @@
           <a:lstStyle/>
           <a:p>
             <a:r>
-              <a:rPr sz="3200" b="1">
+              <a:rPr sz="3000" b="1">
                 <a:solidFill>
                   <a:srgbClr val="FFFFFF"/>
                 </a:solidFill>
@@ -5899,8 +6019,8 @@
         </p:nvSpPr>
         <p:spPr>
           <a:xfrm>
-            <a:off x="777240" y="2286000"/>
-            <a:ext cx="10607040" cy="4754880"/>
+            <a:off x="777240" y="2331720"/>
+            <a:ext cx="7498079" cy="4754880"/>
           </a:xfrm>
           <a:prstGeom prst="rect">
             <a:avLst/>
@@ -5919,7 +6039,7 @@
               </a:spcAft>
             </a:pPr>
             <a:r>
-              <a:rPr sz="2400" b="0">
+              <a:rPr sz="2200" b="0">
                 <a:solidFill>
                   <a:srgbClr val="FFFFFF"/>
                 </a:solidFill>
@@ -5935,7 +6055,7 @@
               </a:spcAft>
             </a:pPr>
             <a:r>
-              <a:rPr sz="2400" b="0">
+              <a:rPr sz="2200" b="0">
                 <a:solidFill>
                   <a:srgbClr val="FFFFFF"/>
                 </a:solidFill>
@@ -5946,6 +6066,30 @@
           </a:p>
         </p:txBody>
       </p:sp>
+      <p:pic>
+        <p:nvPicPr>
+          <p:cNvPr id="6" name="Picture 5" descr="dw-script.jpg"/>
+          <p:cNvPicPr>
+            <a:picLocks noChangeAspect="1"/>
+          </p:cNvPicPr>
+          <p:nvPr/>
+        </p:nvPicPr>
+        <p:blipFill>
+          <a:blip r:embed="rId2"/>
+          <a:stretch>
+            <a:fillRect/>
+          </a:stretch>
+        </p:blipFill>
+        <p:spPr>
+          <a:xfrm>
+            <a:off x="8732520" y="2057400"/>
+            <a:ext cx="2880360" cy="2880360"/>
+          </a:xfrm>
+          <a:prstGeom prst="rect">
+            <a:avLst/>
+          </a:prstGeom>
+        </p:spPr>
+      </p:pic>
     </p:spTree>
   </p:cSld>
   <p:clrMapOvr>
@@ -6049,8 +6193,8 @@
         </p:nvSpPr>
         <p:spPr>
           <a:xfrm>
-            <a:off x="640080" y="685800"/>
-            <a:ext cx="10972800" cy="1463040"/>
+            <a:off x="640080" y="658368"/>
+            <a:ext cx="10972800" cy="1645920"/>
           </a:xfrm>
           <a:prstGeom prst="rect">
             <a:avLst/>
@@ -6064,7 +6208,7 @@
           <a:lstStyle/>
           <a:p>
             <a:r>
-              <a:rPr sz="3200" b="1">
+              <a:rPr sz="3000" b="1">
                 <a:solidFill>
                   <a:srgbClr val="FFFFFF"/>
                 </a:solidFill>
@@ -6234,8 +6378,8 @@
         </p:nvSpPr>
         <p:spPr>
           <a:xfrm>
-            <a:off x="640080" y="685800"/>
-            <a:ext cx="10972800" cy="1463040"/>
+            <a:off x="640080" y="658368"/>
+            <a:ext cx="7863840" cy="1645920"/>
           </a:xfrm>
           <a:prstGeom prst="rect">
             <a:avLst/>
@@ -6249,7 +6393,7 @@
           <a:lstStyle/>
           <a:p>
             <a:r>
-              <a:rPr sz="3200" b="1">
+              <a:rPr sz="3000" b="1">
                 <a:solidFill>
                   <a:srgbClr val="FFFFFF"/>
                 </a:solidFill>
@@ -6268,8 +6412,8 @@
         </p:nvSpPr>
         <p:spPr>
           <a:xfrm>
-            <a:off x="777240" y="2286000"/>
-            <a:ext cx="10607040" cy="4754880"/>
+            <a:off x="777240" y="2331720"/>
+            <a:ext cx="7498079" cy="4754880"/>
           </a:xfrm>
           <a:prstGeom prst="rect">
             <a:avLst/>
@@ -6288,7 +6432,7 @@
               </a:spcAft>
             </a:pPr>
             <a:r>
-              <a:rPr sz="2400" b="0">
+              <a:rPr sz="2200" b="0">
                 <a:solidFill>
                   <a:srgbClr val="FFFFFF"/>
                 </a:solidFill>
@@ -6304,7 +6448,7 @@
               </a:spcAft>
             </a:pPr>
             <a:r>
-              <a:rPr sz="2400" b="0">
+              <a:rPr sz="2200" b="0">
                 <a:solidFill>
                   <a:srgbClr val="FFFFFF"/>
                 </a:solidFill>
@@ -6315,6 +6459,30 @@
           </a:p>
         </p:txBody>
       </p:sp>
+      <p:pic>
+        <p:nvPicPr>
+          <p:cNvPr id="6" name="Picture 5" descr="dw-script.jpg"/>
+          <p:cNvPicPr>
+            <a:picLocks noChangeAspect="1"/>
+          </p:cNvPicPr>
+          <p:nvPr/>
+        </p:nvPicPr>
+        <p:blipFill>
+          <a:blip r:embed="rId2"/>
+          <a:stretch>
+            <a:fillRect/>
+          </a:stretch>
+        </p:blipFill>
+        <p:spPr>
+          <a:xfrm>
+            <a:off x="8732520" y="2057400"/>
+            <a:ext cx="2880360" cy="2880360"/>
+          </a:xfrm>
+          <a:prstGeom prst="rect">
+            <a:avLst/>
+          </a:prstGeom>
+        </p:spPr>
+      </p:pic>
     </p:spTree>
   </p:cSld>
   <p:clrMapOvr>
